--- a/decks/geog-climate-change/geog-climate-change_ch5_mitigation-uk.pptx
+++ b/decks/geog-climate-change/geog-climate-change_ch5_mitigation-uk.pptx
@@ -126,30 +126,30 @@
   <p:extLst>
     <p:ext uri="{521415D9-36F7-43E2-AB2F-B90AF26B5E84}">
       <p14:sectionLst xmlns:p14="http://schemas.microsoft.com/office/powerpoint/2010/main">
-        <p14:section name="Opening" id="{8db412d9-180a-f931-c7cb-ebb9f3cbb987}">
+        <p14:section name="Opening" id="{d973a8be-43e2-f0e6-c30f-f4cb9f041d7e}">
           <p14:sldIdLst>
             <p14:sldId id="256"/>
           </p14:sldIdLst>
         </p14:section>
-        <p14:section name="Gate" id="{418c24d6-b0e5-2607-6567-6f94bd27845a}">
+        <p14:section name="Gate" id="{bf1d627f-f271-4800-dbe6-5e4f455a2e97}">
           <p14:sldIdLst>
             <p14:sldId id="257"/>
             <p14:sldId id="258"/>
           </p14:sldIdLst>
         </p14:section>
-        <p14:section name="Pre-teach" id="{63dc497f-cf51-ebce-7a4a-0c2a45a5f27f}">
+        <p14:section name="Pre-teach" id="{fa8f3778-1c08-265d-8b5e-4b39e7b1f7ec}">
           <p14:sldIdLst>
             <p14:sldId id="259"/>
             <p14:sldId id="260"/>
           </p14:sldIdLst>
         </p14:section>
-        <p14:section name="Read-along" id="{dfe4af94-ad6f-841a-1373-2887220ce412}">
+        <p14:section name="Read-along" id="{dca0ebcc-a251-7355-eef7-2b0b71bbc05e}">
           <p14:sldIdLst>
             <p14:sldId id="261"/>
             <p14:sldId id="262"/>
           </p14:sldIdLst>
         </p14:section>
-        <p14:section name="Teach" id="{f3d6bed6-6841-a7e5-b0a3-f5c98f318f40}">
+        <p14:section name="Teach" id="{c321e6d4-4582-2114-6d82-80879496daab}">
           <p14:sldIdLst>
             <p14:sldId id="263"/>
             <p14:sldId id="264"/>
@@ -159,19 +159,19 @@
             <p14:sldId id="268"/>
           </p14:sldIdLst>
         </p14:section>
-        <p14:section name="Routes" id="{a617b5d1-9960-ba71-62d7-785116e8cf57}">
+        <p14:section name="Routes" id="{d4e387e4-e3b7-dac5-3737-53293c1f363c}">
           <p14:sldIdLst>
             <p14:sldId id="269"/>
             <p14:sldId id="270"/>
             <p14:sldId id="271"/>
           </p14:sldIdLst>
         </p14:section>
-        <p14:section name="Close" id="{90d1bb90-73b2-8fd1-ff3f-b36561ef3604}">
+        <p14:section name="Close" id="{44d4d71f-1d2d-c3df-4a21-8ad88f9f19b5}">
           <p14:sldIdLst>
             <p14:sldId id="272"/>
           </p14:sldIdLst>
         </p14:section>
-        <p14:section name="Answers" id="{e53e1e17-4c24-3f01-1a8e-c0bf69924033}">
+        <p14:section name="Answers" id="{1319317e-d4c6-1b38-c96c-b9c52c5189b6}">
           <p14:sldIdLst>
             <p14:sldId id="273"/>
             <p14:sldId id="274"/>
@@ -953,7 +953,7 @@
               <a:rPr lang="en-US" dirty="0"/>
               <a:t>Teach — Carbon capture. Say it in your own words, then check understanding with a quick question: ask a pupil from the pre-teach group first, since they met these words and ideas before the lesson. Pupils try to recall before you re-explain.
 Carbon capture tackles the problem at the chimney. At a large fossil-fuel power station the fuel is burned as usual, but the carbon dioxide is captured from the exhaust gases instead of going up into the air. The gas is pumped through pipelines to old oil fields, converted into a liquid and injected into the sedimentary rocks deep underground that once held the oil. A layer of impermeable cap rock above stops the carbon dioxide escaping, so it stays locked away.
-Your deck's UK example is a project planned for Yorkshire, taking carbon dioxide from the power stations of the Don Valley near Sheffield. Potentially 18% of the UK's carbon emissions could be captured and stored in an old North Sea oil field. The project was costed at £3 billion and would allow one million homes to use low-carbon electricity. The carbon dioxide would first be used to recover hard-to-reach oil before being stored permanently 3 km under the sea bed.
+Your deck's UK example is a project planned for Yorkshire, taking carbon dioxide from the power stations of the Don Valley, near Sheffield. As much as 18% of the UK's carbon emissions might be trapped there and pumped into a worked-out oil field beneath the North Sea. The scheme was costed at £3 billion and would allow one million homes to use low-carbon electricity. The carbon dioxide would first be used to recover hard-to-reach oil before being stored permanently 3 km under the sea bed.
 Carbon capture lets a country keep using fossil fuels while cutting what reaches the atmosphere, which is why it is attractive. The arguments against are its cost, the fact that it only works at large single sources such as power stations, and the worry that it lets us carry on burning fuel instead of switching to renewables.
 Tip: Describe the process as a chain of four: capture at the power station, pipeline, liquid, injection under cap rock. A chain in order is what a describe-the-process question wants.</a:t>
             </a:r>
@@ -6570,7 +6570,7 @@
                 <a:ea typeface="Calibri" pitchFamily="34" charset="-122"/>
                 <a:cs typeface="Calibri" pitchFamily="34" charset="-120"/>
               </a:rPr>
-              <a:t>Your deck's UK example is a project planned for Yorkshire, taking carbon dioxide from the power stations of the Don Valley near Sheffield.</a:t>
+              <a:t>Your deck's UK example is a project planned for Yorkshire, taking carbon dioxide from the power stations of the Don Valley, near Sheffield.</a:t>
             </a:r>
             <a:endParaRPr lang="en-US" sz="1800" dirty="0"/>
           </a:p>
